--- a/docs/presentations/한국무브넥스_ECT_1차분석_설치실행가이드_20261023.pptx
+++ b/docs/presentations/한국무브넥스_ECT_1차분석_설치실행가이드_20261023.pptx
@@ -13551,26 +13551,6 @@
         <a:noFill xmlns:a="http://schemas.openxmlformats.org/drawingml/2006/main"/>
       </c:spPr>
     </c:plotArea>
-    <c:legend>
-      <c:legendPos val="b"/>
-      <c:overlay val="0"/>
-      <c:txPr>
-        <a:bodyPr xmlns:a="http://schemas.openxmlformats.org/drawingml/2006/main" anchorCtr="1"/>
-        <a:lstStyle xmlns:a="http://schemas.openxmlformats.org/drawingml/2006/main"/>
-        <a:p xmlns:a="http://schemas.openxmlformats.org/drawingml/2006/main">
-          <a:pPr>
-            <a:defRPr sz="1500">
-              <a:solidFill>
-                <a:srgbClr val="172A3A"/>
-              </a:solidFill>
-              <a:latin typeface="맑은 고딕"/>
-              <a:ea typeface="맑은 고딕"/>
-              <a:cs typeface="맑은 고딕"/>
-            </a:defRPr>
-          </a:pPr>
-        </a:p>
-      </c:txPr>
-    </c:legend>
     <c:plotVisOnly val="1"/>
   </c:chart>
   <c:spPr>
@@ -16409,8 +16389,8 @@
           <p:nvPr/>
         </p:nvGraphicFramePr>
         <p:xfrm>
-          <a:off xmlns:a="http://schemas.openxmlformats.org/drawingml/2006/main" x="666750" y="2667000"/>
-          <a:ext xmlns:a="http://schemas.openxmlformats.org/drawingml/2006/main" cx="5143500" cy="2590800"/>
+          <a:off xmlns:a="http://schemas.openxmlformats.org/drawingml/2006/main" x="666750" y="2762250"/>
+          <a:ext xmlns:a="http://schemas.openxmlformats.org/drawingml/2006/main" cx="5143500" cy="2238375"/>
         </p:xfrm>
         <a:graphic xmlns:a="http://schemas.openxmlformats.org/drawingml/2006/main">
           <a:graphicData uri="http://schemas.openxmlformats.org/drawingml/2006/chart">
@@ -16912,6 +16892,300 @@
               <a:t>진성은 같은 날짜·사건의 사후 확인입니다. 시험 날짜에는 기업 진성이 없어 진성 검출률을 평가할 수 없습니다.</a:t>
             </a:r>
           </a:p>
+        </p:txBody>
+      </p:sp>
+      <p:sp>
+        <p:nvSpPr>
+          <p:cNvPr id="27" name="Fixed legend 1">
+            <a:extLst xmlns:a="http://schemas.openxmlformats.org/drawingml/2006/main">
+              <a:ext uri="{FF2B5EF4-FFF2-40B4-BE49-F238E27FC236}">
+                <a16:creationId xmlns:a16="http://schemas.microsoft.com/office/drawing/2014/main" id="{87937320-46F3-46BA-9699-F790C36768C8}"/>
+              </a:ext>
+            </a:extLst>
+          </p:cNvPr>
+          <p:cNvSpPr>
+            <a:spLocks xmlns:a="http://schemas.openxmlformats.org/drawingml/2006/main" noGrp="1"/>
+          </p:cNvSpPr>
+          <p:nvPr/>
+        </p:nvSpPr>
+        <p:spPr>
+          <a:xfrm xmlns:a="http://schemas.openxmlformats.org/drawingml/2006/main">
+            <a:off x="2381250" y="5172075"/>
+            <a:ext cx="1428750" cy="285750"/>
+          </a:xfrm>
+          <a:prstGeom xmlns:a="http://schemas.openxmlformats.org/drawingml/2006/main" prst="rect">
+            <a:avLst/>
+          </a:prstGeom>
+          <a:noFill xmlns:a="http://schemas.openxmlformats.org/drawingml/2006/main"/>
+          <a:ln xmlns:a="http://schemas.openxmlformats.org/drawingml/2006/main" w="0">
+            <a:noFill/>
+          </a:ln>
+        </p:spPr>
+        <p:txBody>
+          <a:bodyPr xmlns:a="http://schemas.openxmlformats.org/drawingml/2006/main" lIns="0" tIns="0" rIns="0" bIns="0" anchor="t">
+            <a:noAutofit/>
+          </a:bodyPr>
+          <a:lstStyle xmlns:a="http://schemas.openxmlformats.org/drawingml/2006/main">
+            <a:defPPr>
+              <a:defRPr sz="1875" b="1">
+                <a:solidFill>
+                  <a:srgbClr val="172A3A"/>
+                </a:solidFill>
+                <a:latin typeface="맑은 고딕"/>
+                <a:ea typeface="맑은 고딕"/>
+                <a:cs typeface="맑은 고딕"/>
+              </a:defRPr>
+            </a:defPPr>
+            <a:lvl1pPr>
+              <a:defRPr sz="1875" b="1">
+                <a:solidFill>
+                  <a:srgbClr val="172A3A"/>
+                </a:solidFill>
+                <a:latin typeface="맑은 고딕"/>
+                <a:ea typeface="맑은 고딕"/>
+                <a:cs typeface="맑은 고딕"/>
+              </a:defRPr>
+            </a:lvl1pPr>
+            <a:lvl2pPr>
+              <a:defRPr sz="1875" b="1">
+                <a:solidFill>
+                  <a:srgbClr val="172A3A"/>
+                </a:solidFill>
+                <a:latin typeface="맑은 고딕"/>
+                <a:ea typeface="맑은 고딕"/>
+                <a:cs typeface="맑은 고딕"/>
+              </a:defRPr>
+            </a:lvl2pPr>
+            <a:lvl3pPr>
+              <a:defRPr sz="1875" b="1">
+                <a:solidFill>
+                  <a:srgbClr val="172A3A"/>
+                </a:solidFill>
+                <a:latin typeface="맑은 고딕"/>
+                <a:ea typeface="맑은 고딕"/>
+                <a:cs typeface="맑은 고딕"/>
+              </a:defRPr>
+            </a:lvl3pPr>
+            <a:lvl4pPr>
+              <a:defRPr sz="1875" b="1">
+                <a:solidFill>
+                  <a:srgbClr val="172A3A"/>
+                </a:solidFill>
+                <a:latin typeface="맑은 고딕"/>
+                <a:ea typeface="맑은 고딕"/>
+                <a:cs typeface="맑은 고딕"/>
+              </a:defRPr>
+            </a:lvl4pPr>
+            <a:lvl5pPr>
+              <a:defRPr sz="1875" b="1">
+                <a:solidFill>
+                  <a:srgbClr val="172A3A"/>
+                </a:solidFill>
+                <a:latin typeface="맑은 고딕"/>
+                <a:ea typeface="맑은 고딕"/>
+                <a:cs typeface="맑은 고딕"/>
+              </a:defRPr>
+            </a:lvl5pPr>
+            <a:lvl6pPr>
+              <a:defRPr sz="1875" b="1">
+                <a:solidFill>
+                  <a:srgbClr val="172A3A"/>
+                </a:solidFill>
+                <a:latin typeface="맑은 고딕"/>
+                <a:ea typeface="맑은 고딕"/>
+                <a:cs typeface="맑은 고딕"/>
+              </a:defRPr>
+            </a:lvl6pPr>
+            <a:lvl7pPr>
+              <a:defRPr sz="1875" b="1">
+                <a:solidFill>
+                  <a:srgbClr val="172A3A"/>
+                </a:solidFill>
+                <a:latin typeface="맑은 고딕"/>
+                <a:ea typeface="맑은 고딕"/>
+                <a:cs typeface="맑은 고딕"/>
+              </a:defRPr>
+            </a:lvl7pPr>
+            <a:lvl8pPr>
+              <a:defRPr sz="1875" b="1">
+                <a:solidFill>
+                  <a:srgbClr val="172A3A"/>
+                </a:solidFill>
+                <a:latin typeface="맑은 고딕"/>
+                <a:ea typeface="맑은 고딕"/>
+                <a:cs typeface="맑은 고딕"/>
+              </a:defRPr>
+            </a:lvl8pPr>
+            <a:lvl9pPr>
+              <a:defRPr sz="1875" b="1">
+                <a:solidFill>
+                  <a:srgbClr val="172A3A"/>
+                </a:solidFill>
+                <a:latin typeface="맑은 고딕"/>
+                <a:ea typeface="맑은 고딕"/>
+                <a:cs typeface="맑은 고딕"/>
+              </a:defRPr>
+            </a:lvl9pPr>
+          </a:lstStyle>
+          <ns0:p xmlns:ns0="http://schemas.openxmlformats.org/drawingml/2006/main">
+            <ns0:r>
+              <ns0:rPr sz="1500" b="0">
+                <ns0:solidFill>
+                  <ns0:srgbClr val="D96343"/>
+                </ns0:solidFill>
+                <ns0:latin typeface="맑은 고딕"/>
+                <ns0:ea typeface="맑은 고딕"/>
+              </ns0:rPr>
+              <ns0:t>■ 진성 의심</ns0:t>
+            </ns0:r>
+          </ns0:p>
+        </p:txBody>
+      </p:sp>
+      <p:sp>
+        <p:nvSpPr>
+          <p:cNvPr id="28" name="Fixed legend 2">
+            <a:extLst xmlns:a="http://schemas.openxmlformats.org/drawingml/2006/main">
+              <a:ext uri="{FF2B5EF4-FFF2-40B4-BE49-F238E27FC236}">
+                <a16:creationId xmlns:a16="http://schemas.microsoft.com/office/drawing/2014/main" id="{87937320-46F3-46BA-9699-F790C36768C8}"/>
+              </a:ext>
+            </a:extLst>
+          </p:cNvPr>
+          <p:cNvSpPr>
+            <a:spLocks xmlns:a="http://schemas.openxmlformats.org/drawingml/2006/main" noGrp="1"/>
+          </p:cNvSpPr>
+          <p:nvPr/>
+        </p:nvSpPr>
+        <p:spPr>
+          <a:xfrm xmlns:a="http://schemas.openxmlformats.org/drawingml/2006/main">
+            <a:off x="3905250" y="5172075"/>
+            <a:ext cx="1143000" cy="285750"/>
+          </a:xfrm>
+          <a:prstGeom xmlns:a="http://schemas.openxmlformats.org/drawingml/2006/main" prst="rect">
+            <a:avLst/>
+          </a:prstGeom>
+          <a:noFill xmlns:a="http://schemas.openxmlformats.org/drawingml/2006/main"/>
+          <a:ln xmlns:a="http://schemas.openxmlformats.org/drawingml/2006/main" w="0">
+            <a:noFill/>
+          </a:ln>
+        </p:spPr>
+        <p:txBody>
+          <a:bodyPr xmlns:a="http://schemas.openxmlformats.org/drawingml/2006/main" lIns="0" tIns="0" rIns="0" bIns="0" anchor="t">
+            <a:noAutofit/>
+          </a:bodyPr>
+          <a:lstStyle xmlns:a="http://schemas.openxmlformats.org/drawingml/2006/main">
+            <a:defPPr>
+              <a:defRPr sz="1875" b="1">
+                <a:solidFill>
+                  <a:srgbClr val="172A3A"/>
+                </a:solidFill>
+                <a:latin typeface="맑은 고딕"/>
+                <a:ea typeface="맑은 고딕"/>
+                <a:cs typeface="맑은 고딕"/>
+              </a:defRPr>
+            </a:defPPr>
+            <a:lvl1pPr>
+              <a:defRPr sz="1875" b="1">
+                <a:solidFill>
+                  <a:srgbClr val="172A3A"/>
+                </a:solidFill>
+                <a:latin typeface="맑은 고딕"/>
+                <a:ea typeface="맑은 고딕"/>
+                <a:cs typeface="맑은 고딕"/>
+              </a:defRPr>
+            </a:lvl1pPr>
+            <a:lvl2pPr>
+              <a:defRPr sz="1875" b="1">
+                <a:solidFill>
+                  <a:srgbClr val="172A3A"/>
+                </a:solidFill>
+                <a:latin typeface="맑은 고딕"/>
+                <a:ea typeface="맑은 고딕"/>
+                <a:cs typeface="맑은 고딕"/>
+              </a:defRPr>
+            </a:lvl2pPr>
+            <a:lvl3pPr>
+              <a:defRPr sz="1875" b="1">
+                <a:solidFill>
+                  <a:srgbClr val="172A3A"/>
+                </a:solidFill>
+                <a:latin typeface="맑은 고딕"/>
+                <a:ea typeface="맑은 고딕"/>
+                <a:cs typeface="맑은 고딕"/>
+              </a:defRPr>
+            </a:lvl3pPr>
+            <a:lvl4pPr>
+              <a:defRPr sz="1875" b="1">
+                <a:solidFill>
+                  <a:srgbClr val="172A3A"/>
+                </a:solidFill>
+                <a:latin typeface="맑은 고딕"/>
+                <a:ea typeface="맑은 고딕"/>
+                <a:cs typeface="맑은 고딕"/>
+              </a:defRPr>
+            </a:lvl4pPr>
+            <a:lvl5pPr>
+              <a:defRPr sz="1875" b="1">
+                <a:solidFill>
+                  <a:srgbClr val="172A3A"/>
+                </a:solidFill>
+                <a:latin typeface="맑은 고딕"/>
+                <a:ea typeface="맑은 고딕"/>
+                <a:cs typeface="맑은 고딕"/>
+              </a:defRPr>
+            </a:lvl5pPr>
+            <a:lvl6pPr>
+              <a:defRPr sz="1875" b="1">
+                <a:solidFill>
+                  <a:srgbClr val="172A3A"/>
+                </a:solidFill>
+                <a:latin typeface="맑은 고딕"/>
+                <a:ea typeface="맑은 고딕"/>
+                <a:cs typeface="맑은 고딕"/>
+              </a:defRPr>
+            </a:lvl6pPr>
+            <a:lvl7pPr>
+              <a:defRPr sz="1875" b="1">
+                <a:solidFill>
+                  <a:srgbClr val="172A3A"/>
+                </a:solidFill>
+                <a:latin typeface="맑은 고딕"/>
+                <a:ea typeface="맑은 고딕"/>
+                <a:cs typeface="맑은 고딕"/>
+              </a:defRPr>
+            </a:lvl7pPr>
+            <a:lvl8pPr>
+              <a:defRPr sz="1875" b="1">
+                <a:solidFill>
+                  <a:srgbClr val="172A3A"/>
+                </a:solidFill>
+                <a:latin typeface="맑은 고딕"/>
+                <a:ea typeface="맑은 고딕"/>
+                <a:cs typeface="맑은 고딕"/>
+              </a:defRPr>
+            </a:lvl8pPr>
+            <a:lvl9pPr>
+              <a:defRPr sz="1875" b="1">
+                <a:solidFill>
+                  <a:srgbClr val="172A3A"/>
+                </a:solidFill>
+                <a:latin typeface="맑은 고딕"/>
+                <a:ea typeface="맑은 고딕"/>
+                <a:cs typeface="맑은 고딕"/>
+              </a:defRPr>
+            </a:lvl9pPr>
+          </a:lstStyle>
+          <ns0:p xmlns:ns0="http://schemas.openxmlformats.org/drawingml/2006/main">
+            <ns0:r>
+              <ns0:rPr sz="1500" b="0">
+                <ns0:solidFill>
+                  <ns0:srgbClr val="8799AB"/>
+                </ns0:solidFill>
+                <ns0:latin typeface="맑은 고딕"/>
+                <ns0:ea typeface="맑은 고딕"/>
+              </ns0:rPr>
+              <ns0:t>■ 보류</ns0:t>
+            </ns0:r>
+          </ns0:p>
         </p:txBody>
       </p:sp>
     </p:spTree>
